--- a/Object Oriented Design and Programming/Seminars/Seminar12/SupplyChainGuard_Capstone.pptx
+++ b/Object Oriented Design and Programming/Seminars/Seminar12/SupplyChainGuard_Capstone.pptx
@@ -2195,7 +2195,7 @@
                   <a:schemeClr val="accent5"/>
                 </a:solidFill>
               </a:rPr>
-              <a:t>Molly Mae Fraser  |  MSc Computer Science, University of Essex</a:t>
+              <a:t>MSc Computer Science, University of Essex</a:t>
             </a:r>
             <a:endParaRPr lang="en-US" sz="1400" dirty="0"/>
           </a:p>
@@ -2404,7 +2404,7 @@
                   <a:schemeClr val="bg1"/>
                 </a:solidFill>
               </a:rPr>
-              <a:t>Honest limitations</a:t>
+              <a:t>Known limitations</a:t>
             </a:r>
             <a:endParaRPr lang="en-US" sz="1800" dirty="0"/>
           </a:p>
